--- a/ppt/Phase_3_NumPy_배열로서의이미지.pptx
+++ b/ppt/Phase_3_NumPy_배열로서의이미지.pptx
@@ -14,9 +14,10 @@
     <p:sldId id="262" r:id="rId8"/>
     <p:sldId id="263" r:id="rId9"/>
     <p:sldId id="264" r:id="rId10"/>
+    <p:sldId id="265" r:id="rId11"/>
   </p:sldIdLst>
   <p:notesMasterIdLst>
-    <p:notesMasterId r:id="rId11"/>
+    <p:notesMasterId r:id="rId12"/>
   </p:notesMasterIdLst>
   <p:sldSz cx="9144000" cy="5143500"/>
   <p:notesSz cx="5143500" cy="9144000"/>
@@ -534,6 +535,94 @@
             <a:fld id="{F7021451-1387-4CA6-816F-3879F97B5CBC}" type="slidenum">
               <a:rPr lang="en-US"/>
               <a:t>1</a:t>
+            </a:fld>
+            <a:endParaRPr lang="en-US"/>
+          </a:p>
+        </p:txBody>
+      </p:sp>
+    </p:spTree>
+    <p:extLst>
+      <p:ext uri="{BB962C8B-B14F-4D97-AF65-F5344CB8AC3E}">
+        <p14:creationId xmlns:p14="http://schemas.microsoft.com/office/powerpoint/2010/main" val="1024086991"/>
+      </p:ext>
+    </p:extLst>
+  </p:cSld>
+  <p:clrMapOvr>
+    <a:masterClrMapping/>
+  </p:clrMapOvr>
+</p:notes>
+</file>
+
+<file path=ppt/notesSlides/notesSlide10.xml><?xml version="1.0" encoding="utf-8"?>
+<p:notes xmlns:a="http://schemas.openxmlformats.org/drawingml/2006/main" xmlns:r="http://schemas.openxmlformats.org/officeDocument/2006/relationships" xmlns:p="http://schemas.openxmlformats.org/presentationml/2006/main">
+  <p:cSld>
+    <p:spTree>
+      <p:nvGrpSpPr>
+        <p:cNvPr id="1" name=""/>
+        <p:cNvGrpSpPr/>
+        <p:nvPr/>
+      </p:nvGrpSpPr>
+      <p:grpSpPr>
+        <a:xfrm>
+          <a:off x="0" y="0"/>
+          <a:ext cx="0" cy="0"/>
+          <a:chOff x="0" y="0"/>
+          <a:chExt cx="0" cy="0"/>
+        </a:xfrm>
+      </p:grpSpPr>
+      <p:sp>
+        <p:nvSpPr>
+          <p:cNvPr id="2" name="Slide Image Placeholder 1"/>
+          <p:cNvSpPr>
+            <a:spLocks noGrp="1" noRot="1" noChangeAspect="1"/>
+          </p:cNvSpPr>
+          <p:nvPr>
+            <p:ph type="sldImg"/>
+          </p:nvPr>
+        </p:nvSpPr>
+        <p:spPr/>
+      </p:sp>
+      <p:sp>
+        <p:nvSpPr>
+          <p:cNvPr id="3" name="Notes Placeholder 2"/>
+          <p:cNvSpPr>
+            <a:spLocks noGrp="1"/>
+          </p:cNvSpPr>
+          <p:nvPr>
+            <p:ph type="body" idx="1"/>
+          </p:nvPr>
+        </p:nvSpPr>
+        <p:spPr/>
+        <p:txBody>
+          <a:bodyPr/>
+          <a:lstStyle/>
+          <a:p>
+            <a:r>
+              <a:rPr lang="en-US" dirty="0"/>
+              <a:t/>
+            </a:r>
+            <a:endParaRPr lang="en-US" dirty="0"/>
+          </a:p>
+        </p:txBody>
+      </p:sp>
+      <p:sp>
+        <p:nvSpPr>
+          <p:cNvPr id="4" name="Slide Number Placeholder 3"/>
+          <p:cNvSpPr>
+            <a:spLocks noGrp="1"/>
+          </p:cNvSpPr>
+          <p:nvPr>
+            <p:ph type="sldNum" sz="quarter" idx="10"/>
+          </p:nvPr>
+        </p:nvSpPr>
+        <p:spPr/>
+        <p:txBody>
+          <a:bodyPr/>
+          <a:lstStyle/>
+          <a:p>
+            <a:fld id="{F7021451-1387-4CA6-816F-3879F97B5CBC}" type="slidenum">
+              <a:rPr lang="en-US"/>
+              <a:t>10</a:t>
             </a:fld>
             <a:endParaRPr lang="en-US"/>
           </a:p>
@@ -1794,6 +1883,249 @@
 </p:sld>
 </file>
 
+<file path=ppt/slides/slide10.xml><?xml version="1.0" encoding="utf-8"?>
+<p:sld xmlns:a="http://schemas.openxmlformats.org/drawingml/2006/main" xmlns:r="http://schemas.openxmlformats.org/officeDocument/2006/relationships" xmlns:p="http://schemas.openxmlformats.org/presentationml/2006/main">
+  <p:cSld name="Slide 10">
+    <p:bg>
+      <p:bgPr>
+        <a:solidFill>
+          <a:srgbClr val="1F2A37"/>
+        </a:solidFill>
+      </p:bgPr>
+    </p:bg>
+    <p:spTree>
+      <p:nvGrpSpPr>
+        <p:cNvPr id="1" name=""/>
+        <p:cNvGrpSpPr/>
+        <p:nvPr/>
+      </p:nvGrpSpPr>
+      <p:grpSpPr>
+        <a:xfrm>
+          <a:off x="0" y="0"/>
+          <a:ext cx="0" cy="0"/>
+          <a:chOff x="0" y="0"/>
+          <a:chExt cx="0" cy="0"/>
+        </a:xfrm>
+      </p:grpSpPr>
+      <p:sp>
+        <p:nvSpPr>
+          <p:cNvPr id="2" name="Text 0"/>
+          <p:cNvSpPr/>
+          <p:nvPr/>
+        </p:nvSpPr>
+        <p:spPr>
+          <a:xfrm>
+            <a:off x="640080" y="1188720"/>
+            <a:ext cx="7863840" cy="548640"/>
+          </a:xfrm>
+          <a:prstGeom prst="rect">
+            <a:avLst/>
+          </a:prstGeom>
+          <a:noFill/>
+          <a:ln/>
+        </p:spPr>
+        <p:txBody>
+          <a:bodyPr wrap="square" rtlCol="0" anchor="ctr"/>
+          <a:lstStyle/>
+          <a:p>
+            <a:pPr indent="0" marL="0">
+              <a:buNone/>
+            </a:pPr>
+            <a:r>
+              <a:rPr lang="en-US" sz="1500" b="1" spc="300" kern="0" dirty="0">
+                <a:solidFill>
+                  <a:srgbClr val="5EEAD4"/>
+                </a:solidFill>
+                <a:latin typeface="나눔고딕" pitchFamily="34" charset="0"/>
+                <a:ea typeface="나눔고딕" pitchFamily="34" charset="-122"/>
+                <a:cs typeface="나눔고딕" pitchFamily="34" charset="-120"/>
+              </a:rPr>
+              <a:t>실습 안내</a:t>
+            </a:r>
+            <a:endParaRPr lang="en-US" sz="1500" dirty="0"/>
+          </a:p>
+        </p:txBody>
+      </p:sp>
+      <p:sp>
+        <p:nvSpPr>
+          <p:cNvPr id="3" name="Text 1"/>
+          <p:cNvSpPr/>
+          <p:nvPr/>
+        </p:nvSpPr>
+        <p:spPr>
+          <a:xfrm>
+            <a:off x="640080" y="1691640"/>
+            <a:ext cx="7863840" cy="731520"/>
+          </a:xfrm>
+          <a:prstGeom prst="rect">
+            <a:avLst/>
+          </a:prstGeom>
+          <a:noFill/>
+          <a:ln/>
+        </p:spPr>
+        <p:txBody>
+          <a:bodyPr wrap="square" rtlCol="0" anchor="ctr"/>
+          <a:lstStyle/>
+          <a:p>
+            <a:pPr indent="0" marL="0">
+              <a:buNone/>
+            </a:pPr>
+            <a:r>
+              <a:rPr lang="en-US" sz="3000" b="1" dirty="0">
+                <a:solidFill>
+                  <a:srgbClr val="FFFFFF"/>
+                </a:solidFill>
+                <a:latin typeface="나눔고딕" pitchFamily="34" charset="0"/>
+                <a:ea typeface="나눔고딕" pitchFamily="34" charset="-122"/>
+                <a:cs typeface="나눔고딕" pitchFamily="34" charset="-120"/>
+              </a:rPr>
+              <a:t>배열로 이미지 다뤄보기</a:t>
+            </a:r>
+            <a:endParaRPr lang="en-US" sz="3000" dirty="0"/>
+          </a:p>
+        </p:txBody>
+      </p:sp>
+      <p:sp>
+        <p:nvSpPr>
+          <p:cNvPr id="4" name="Text 2"/>
+          <p:cNvSpPr/>
+          <p:nvPr/>
+        </p:nvSpPr>
+        <p:spPr>
+          <a:xfrm>
+            <a:off x="640080" y="2743200"/>
+            <a:ext cx="7863840" cy="1280160"/>
+          </a:xfrm>
+          <a:prstGeom prst="rect">
+            <a:avLst/>
+          </a:prstGeom>
+          <a:noFill/>
+          <a:ln/>
+        </p:spPr>
+        <p:txBody>
+          <a:bodyPr wrap="square" rtlCol="0" anchor="t"/>
+          <a:lstStyle/>
+          <a:p>
+            <a:pPr marL="342900" indent="-342900">
+              <a:lnSpc>
+                <a:spcPts val="2800"/>
+              </a:lnSpc>
+              <a:spcAft>
+                <a:spcPts val="800"/>
+              </a:spcAft>
+              <a:buSzPct val="100000"/>
+              <a:buChar char="•"/>
+            </a:pPr>
+            <a:r>
+              <a:rPr lang="en-US" sz="1600" dirty="0">
+                <a:solidFill>
+                  <a:srgbClr val="E2E8F0"/>
+                </a:solidFill>
+                <a:latin typeface="나눔고딕" pitchFamily="34" charset="0"/>
+                <a:ea typeface="나눔고딕" pitchFamily="34" charset="-122"/>
+                <a:cs typeface="나눔고딕" pitchFamily="34" charset="-120"/>
+              </a:rPr>
+              <a:t>예제 이미지를 만들어 shape · dtype 확인하기</a:t>
+            </a:r>
+            <a:endParaRPr lang="en-US" sz="1600" dirty="0"/>
+          </a:p>
+          <a:p>
+            <a:pPr marL="342900" indent="-342900">
+              <a:lnSpc>
+                <a:spcPts val="2800"/>
+              </a:lnSpc>
+              <a:spcAft>
+                <a:spcPts val="800"/>
+              </a:spcAft>
+              <a:buSzPct val="100000"/>
+              <a:buChar char="•"/>
+            </a:pPr>
+            <a:r>
+              <a:rPr lang="en-US" sz="1600" dirty="0">
+                <a:solidFill>
+                  <a:srgbClr val="E2E8F0"/>
+                </a:solidFill>
+                <a:latin typeface="나눔고딕" pitchFamily="34" charset="0"/>
+                <a:ea typeface="나눔고딕" pitchFamily="34" charset="-122"/>
+                <a:cs typeface="나눔고딕" pitchFamily="34" charset="-120"/>
+              </a:rPr>
+              <a:t>슬라이싱으로 ROI 잘라내고 값 바꿔보기</a:t>
+            </a:r>
+            <a:endParaRPr lang="en-US" sz="1600" dirty="0"/>
+          </a:p>
+          <a:p>
+            <a:pPr marL="342900" indent="-342900">
+              <a:lnSpc>
+                <a:spcPts val="2800"/>
+              </a:lnSpc>
+              <a:spcAft>
+                <a:spcPts val="800"/>
+              </a:spcAft>
+              <a:buSzPct val="100000"/>
+              <a:buChar char="•"/>
+            </a:pPr>
+            <a:r>
+              <a:rPr lang="en-US" sz="1600" dirty="0">
+                <a:solidFill>
+                  <a:srgbClr val="E2E8F0"/>
+                </a:solidFill>
+                <a:latin typeface="나눔고딕" pitchFamily="34" charset="0"/>
+                <a:ea typeface="나눔고딕" pitchFamily="34" charset="-122"/>
+                <a:cs typeface="나눔고딕" pitchFamily="34" charset="-120"/>
+              </a:rPr>
+              <a:t>조건 마스크로 특정 밝기 픽셀만 세기</a:t>
+            </a:r>
+            <a:endParaRPr lang="en-US" sz="1600" dirty="0"/>
+          </a:p>
+        </p:txBody>
+      </p:sp>
+      <p:sp>
+        <p:nvSpPr>
+          <p:cNvPr id="5" name="Text 3"/>
+          <p:cNvSpPr/>
+          <p:nvPr/>
+        </p:nvSpPr>
+        <p:spPr>
+          <a:xfrm>
+            <a:off x="640080" y="4160520"/>
+            <a:ext cx="7863840" cy="457200"/>
+          </a:xfrm>
+          <a:prstGeom prst="rect">
+            <a:avLst/>
+          </a:prstGeom>
+          <a:noFill/>
+          <a:ln/>
+        </p:spPr>
+        <p:txBody>
+          <a:bodyPr wrap="square" rtlCol="0" anchor="t"/>
+          <a:lstStyle/>
+          <a:p>
+            <a:pPr indent="0" marL="0">
+              <a:buNone/>
+            </a:pPr>
+            <a:r>
+              <a:rPr lang="en-US" sz="1350" i="1" dirty="0">
+                <a:solidFill>
+                  <a:srgbClr val="94A3B8"/>
+                </a:solidFill>
+                <a:latin typeface="나눔고딕" pitchFamily="34" charset="0"/>
+                <a:ea typeface="나눔고딕" pitchFamily="34" charset="-122"/>
+                <a:cs typeface="나눔고딕" pitchFamily="34" charset="-120"/>
+              </a:rPr>
+              <a:t>실습: 03_numpy_image.ipynb · 03_practice.ipynb</a:t>
+            </a:r>
+            <a:endParaRPr lang="en-US" sz="1350" dirty="0"/>
+          </a:p>
+        </p:txBody>
+      </p:sp>
+    </p:spTree>
+  </p:cSld>
+  <p:clrMapOvr>
+    <a:masterClrMapping/>
+  </p:clrMapOvr>
+</p:sld>
+</file>
+
 <file path=ppt/slides/slide2.xml><?xml version="1.0" encoding="utf-8"?>
 <p:sld xmlns:a="http://schemas.openxmlformats.org/drawingml/2006/main" xmlns:r="http://schemas.openxmlformats.org/officeDocument/2006/relationships" xmlns:p="http://schemas.openxmlformats.org/presentationml/2006/main">
   <p:cSld name="Slide 2">
@@ -8670,7 +9002,7 @@
     <p:bg>
       <p:bgPr>
         <a:solidFill>
-          <a:srgbClr val="1F2A37"/>
+          <a:srgbClr val="FFFFFF"/>
         </a:solidFill>
       </p:bgPr>
     </p:bg>
@@ -8696,34 +9028,34 @@
         </p:nvSpPr>
         <p:spPr>
           <a:xfrm>
-            <a:off x="640080" y="1188720"/>
-            <a:ext cx="7863840" cy="548640"/>
-          </a:xfrm>
-          <a:prstGeom prst="rect">
-            <a:avLst/>
-          </a:prstGeom>
-          <a:noFill/>
-          <a:ln/>
-        </p:spPr>
-        <p:txBody>
-          <a:bodyPr wrap="square" rtlCol="0" anchor="ctr"/>
+            <a:off x="457200" y="365760"/>
+            <a:ext cx="6949440" cy="640080"/>
+          </a:xfrm>
+          <a:prstGeom prst="rect">
+            <a:avLst/>
+          </a:prstGeom>
+          <a:noFill/>
+          <a:ln/>
+        </p:spPr>
+        <p:txBody>
+          <a:bodyPr wrap="square" lIns="0" tIns="0" rIns="0" bIns="0" rtlCol="0" anchor="ctr"/>
           <a:lstStyle/>
           <a:p>
             <a:pPr indent="0" marL="0">
               <a:buNone/>
             </a:pPr>
             <a:r>
-              <a:rPr lang="en-US" sz="1500" b="1" spc="300" kern="0" dirty="0">
-                <a:solidFill>
-                  <a:srgbClr val="5EEAD4"/>
+              <a:rPr lang="en-US" sz="3000" b="1" dirty="0">
+                <a:solidFill>
+                  <a:srgbClr val="1E293B"/>
                 </a:solidFill>
                 <a:latin typeface="나눔고딕" pitchFamily="34" charset="0"/>
                 <a:ea typeface="나눔고딕" pitchFamily="34" charset="-122"/>
                 <a:cs typeface="나눔고딕" pitchFamily="34" charset="-120"/>
               </a:rPr>
-              <a:t>실습 안내</a:t>
-            </a:r>
-            <a:endParaRPr lang="en-US" sz="1500" dirty="0"/>
+              <a:t>값과 위치: max vs argmax</a:t>
+            </a:r>
+            <a:endParaRPr lang="en-US" sz="3000" dirty="0"/>
           </a:p>
         </p:txBody>
       </p:sp>
@@ -8735,8 +9067,8 @@
         </p:nvSpPr>
         <p:spPr>
           <a:xfrm>
-            <a:off x="640080" y="1691640"/>
-            <a:ext cx="7863840" cy="731520"/>
+            <a:off x="7406640" y="475488"/>
+            <a:ext cx="1280160" cy="365760"/>
           </a:xfrm>
           <a:prstGeom prst="rect">
             <a:avLst/>
@@ -8748,21 +9080,21 @@
           <a:bodyPr wrap="square" rtlCol="0" anchor="ctr"/>
           <a:lstStyle/>
           <a:p>
-            <a:pPr indent="0" marL="0">
-              <a:buNone/>
-            </a:pPr>
-            <a:r>
-              <a:rPr lang="en-US" sz="3000" b="1" dirty="0">
-                <a:solidFill>
-                  <a:srgbClr val="FFFFFF"/>
+            <a:pPr algn="r" indent="0" marL="0">
+              <a:buNone/>
+            </a:pPr>
+            <a:r>
+              <a:rPr lang="en-US" sz="1200" b="1" dirty="0">
+                <a:solidFill>
+                  <a:srgbClr val="0D9488"/>
                 </a:solidFill>
                 <a:latin typeface="나눔고딕" pitchFamily="34" charset="0"/>
                 <a:ea typeface="나눔고딕" pitchFamily="34" charset="-122"/>
                 <a:cs typeface="나눔고딕" pitchFamily="34" charset="-120"/>
               </a:rPr>
-              <a:t>배열로 이미지 다뤄보기</a:t>
-            </a:r>
-            <a:endParaRPr lang="en-US" sz="3000" dirty="0"/>
+              <a:t>W7–W9</a:t>
+            </a:r>
+            <a:endParaRPr lang="en-US" sz="1200" dirty="0"/>
           </a:p>
         </p:txBody>
       </p:sp>
@@ -8774,8 +9106,349 @@
         </p:nvSpPr>
         <p:spPr>
           <a:xfrm>
-            <a:off x="640080" y="2743200"/>
-            <a:ext cx="7863840" cy="1280160"/>
+            <a:off x="457200" y="1051560"/>
+            <a:ext cx="8229600" cy="731520"/>
+          </a:xfrm>
+          <a:prstGeom prst="rect">
+            <a:avLst/>
+          </a:prstGeom>
+          <a:noFill/>
+          <a:ln/>
+        </p:spPr>
+        <p:txBody>
+          <a:bodyPr wrap="square" rtlCol="0" anchor="t"/>
+          <a:lstStyle/>
+          <a:p>
+            <a:pPr indent="0" marL="0">
+              <a:lnSpc>
+                <a:spcPts val="2300"/>
+              </a:lnSpc>
+              <a:buNone/>
+            </a:pPr>
+            <a:r>
+              <a:rPr lang="en-US" sz="1450" dirty="0">
+                <a:solidFill>
+                  <a:srgbClr val="1E293B"/>
+                </a:solidFill>
+                <a:latin typeface="나눔고딕" pitchFamily="34" charset="0"/>
+                <a:ea typeface="나눔고딕" pitchFamily="34" charset="-122"/>
+                <a:cs typeface="나눔고딕" pitchFamily="34" charset="-120"/>
+              </a:rPr>
+              <a:t>max·min 은 </a:t>
+            </a:r>
+            <a:pPr indent="0" marL="0">
+              <a:lnSpc>
+                <a:spcPts val="2300"/>
+              </a:lnSpc>
+              <a:buNone/>
+            </a:pPr>
+            <a:r>
+              <a:rPr lang="en-US" sz="1450" b="1" dirty="0">
+                <a:solidFill>
+                  <a:srgbClr val="1E293B"/>
+                </a:solidFill>
+                <a:latin typeface="나눔고딕" pitchFamily="34" charset="0"/>
+                <a:ea typeface="나눔고딕" pitchFamily="34" charset="-122"/>
+                <a:cs typeface="나눔고딕" pitchFamily="34" charset="-120"/>
+              </a:rPr>
+              <a:t>값</a:t>
+            </a:r>
+            <a:pPr indent="0" marL="0">
+              <a:lnSpc>
+                <a:spcPts val="2300"/>
+              </a:lnSpc>
+              <a:buNone/>
+            </a:pPr>
+            <a:r>
+              <a:rPr lang="en-US" sz="1450" dirty="0">
+                <a:solidFill>
+                  <a:srgbClr val="1E293B"/>
+                </a:solidFill>
+                <a:latin typeface="나눔고딕" pitchFamily="34" charset="0"/>
+                <a:ea typeface="나눔고딕" pitchFamily="34" charset="-122"/>
+                <a:cs typeface="나눔고딕" pitchFamily="34" charset="-120"/>
+              </a:rPr>
+              <a:t>을 주고, </a:t>
+            </a:r>
+            <a:pPr indent="0" marL="0">
+              <a:lnSpc>
+                <a:spcPts val="2300"/>
+              </a:lnSpc>
+              <a:buNone/>
+            </a:pPr>
+            <a:r>
+              <a:rPr lang="en-US" sz="1450" b="1" dirty="0">
+                <a:solidFill>
+                  <a:srgbClr val="1E293B"/>
+                </a:solidFill>
+                <a:latin typeface="나눔고딕" pitchFamily="34" charset="0"/>
+                <a:ea typeface="나눔고딕" pitchFamily="34" charset="-122"/>
+                <a:cs typeface="나눔고딕" pitchFamily="34" charset="-120"/>
+              </a:rPr>
+              <a:t>argmax·argmin 은 그 값이 있는 위치(인덱스)</a:t>
+            </a:r>
+            <a:pPr indent="0" marL="0">
+              <a:lnSpc>
+                <a:spcPts val="2300"/>
+              </a:lnSpc>
+              <a:buNone/>
+            </a:pPr>
+            <a:r>
+              <a:rPr lang="en-US" sz="1450" dirty="0">
+                <a:solidFill>
+                  <a:srgbClr val="1E293B"/>
+                </a:solidFill>
+                <a:latin typeface="나눔고딕" pitchFamily="34" charset="0"/>
+                <a:ea typeface="나눔고딕" pitchFamily="34" charset="-122"/>
+                <a:cs typeface="나눔고딕" pitchFamily="34" charset="-120"/>
+              </a:rPr>
+              <a:t>를 줍니다. 계측에서는 "가장 밝은/변화가 큰 곳이 어디인가"처럼 위치가 필요할 때가 많습니다.</a:t>
+            </a:r>
+            <a:endParaRPr lang="en-US" sz="1450" dirty="0"/>
+          </a:p>
+        </p:txBody>
+      </p:sp>
+      <p:sp>
+        <p:nvSpPr>
+          <p:cNvPr id="5" name="Shape 3"/>
+          <p:cNvSpPr/>
+          <p:nvPr/>
+        </p:nvSpPr>
+        <p:spPr>
+          <a:xfrm>
+            <a:off x="457200" y="1965960"/>
+            <a:ext cx="4572000" cy="2286000"/>
+          </a:xfrm>
+          <a:prstGeom prst="roundRect">
+            <a:avLst>
+              <a:gd name="adj" fmla="val 2000"/>
+            </a:avLst>
+          </a:prstGeom>
+          <a:solidFill>
+            <a:srgbClr val="F1F5F9"/>
+          </a:solidFill>
+          <a:ln w="12700">
+            <a:solidFill>
+              <a:srgbClr val="E2E8F0"/>
+            </a:solidFill>
+            <a:prstDash val="solid"/>
+          </a:ln>
+        </p:spPr>
+      </p:sp>
+      <p:sp>
+        <p:nvSpPr>
+          <p:cNvPr id="6" name="Text 4"/>
+          <p:cNvSpPr/>
+          <p:nvPr/>
+        </p:nvSpPr>
+        <p:spPr>
+          <a:xfrm>
+            <a:off x="594360" y="2075688"/>
+            <a:ext cx="4297680" cy="2066544"/>
+          </a:xfrm>
+          <a:prstGeom prst="rect">
+            <a:avLst/>
+          </a:prstGeom>
+          <a:noFill/>
+          <a:ln/>
+        </p:spPr>
+        <p:txBody>
+          <a:bodyPr wrap="square" lIns="0" tIns="0" rIns="0" bIns="0" rtlCol="0" anchor="t"/>
+          <a:lstStyle/>
+          <a:p>
+            <a:pPr algn="l" indent="0" marL="0">
+              <a:lnSpc>
+                <a:spcPts val="1800"/>
+              </a:lnSpc>
+              <a:buNone/>
+            </a:pPr>
+            <a:r>
+              <a:rPr lang="en-US" sz="1250" dirty="0">
+                <a:solidFill>
+                  <a:srgbClr val="1E293B"/>
+                </a:solidFill>
+                <a:latin typeface="Courier New" pitchFamily="34" charset="0"/>
+                <a:ea typeface="Courier New" pitchFamily="34" charset="-122"/>
+                <a:cs typeface="Courier New" pitchFamily="34" charset="-120"/>
+              </a:rPr>
+              <a:t>a = np.array([12, 45, 7, 45])</a:t>
+            </a:r>
+            <a:endParaRPr lang="en-US" sz="1250" dirty="0"/>
+          </a:p>
+          <a:p>
+            <a:pPr algn="l" indent="0" marL="0">
+              <a:lnSpc>
+                <a:spcPts val="1800"/>
+              </a:lnSpc>
+              <a:buNone/>
+            </a:pPr>
+            <a:r>
+              <a:rPr lang="en-US" sz="1250" dirty="0">
+                <a:solidFill>
+                  <a:srgbClr val="1E293B"/>
+                </a:solidFill>
+                <a:latin typeface="Courier New" pitchFamily="34" charset="0"/>
+                <a:ea typeface="Courier New" pitchFamily="34" charset="-122"/>
+                <a:cs typeface="Courier New" pitchFamily="34" charset="-120"/>
+              </a:rPr>
+              <a:t>a.max()       # 45   (값)</a:t>
+            </a:r>
+            <a:endParaRPr lang="en-US" sz="1250" dirty="0"/>
+          </a:p>
+          <a:p>
+            <a:pPr algn="l" indent="0" marL="0">
+              <a:lnSpc>
+                <a:spcPts val="1800"/>
+              </a:lnSpc>
+              <a:buNone/>
+            </a:pPr>
+            <a:r>
+              <a:rPr lang="en-US" sz="1250" dirty="0">
+                <a:solidFill>
+                  <a:srgbClr val="1E293B"/>
+                </a:solidFill>
+                <a:latin typeface="Courier New" pitchFamily="34" charset="0"/>
+                <a:ea typeface="Courier New" pitchFamily="34" charset="-122"/>
+                <a:cs typeface="Courier New" pitchFamily="34" charset="-120"/>
+              </a:rPr>
+              <a:t>a.argmax()    # 1    (위치: 첫 최댓값)</a:t>
+            </a:r>
+            <a:endParaRPr lang="en-US" sz="1250" dirty="0"/>
+          </a:p>
+          <a:p>
+            <a:pPr algn="l" indent="0" marL="0">
+              <a:lnSpc>
+                <a:spcPts val="1800"/>
+              </a:lnSpc>
+              <a:buNone/>
+            </a:pPr>
+            <a:r>
+              <a:rPr lang="en-US" sz="1250" dirty="0">
+                <a:solidFill>
+                  <a:srgbClr val="1E293B"/>
+                </a:solidFill>
+                <a:latin typeface="Courier New" pitchFamily="34" charset="0"/>
+                <a:ea typeface="Courier New" pitchFamily="34" charset="-122"/>
+                <a:cs typeface="Courier New" pitchFamily="34" charset="-120"/>
+              </a:rPr>
+              <a:t>a.argmin()    # 2    (위치)</a:t>
+            </a:r>
+            <a:endParaRPr lang="en-US" sz="1250" dirty="0"/>
+          </a:p>
+          <a:p>
+            <a:pPr algn="l" indent="0" marL="0">
+              <a:lnSpc>
+                <a:spcPts val="1800"/>
+              </a:lnSpc>
+              <a:buNone/>
+            </a:pPr>
+            <a:endParaRPr lang="en-US" sz="1250" dirty="0"/>
+          </a:p>
+          <a:p>
+            <a:pPr algn="l" indent="0" marL="0">
+              <a:lnSpc>
+                <a:spcPts val="1800"/>
+              </a:lnSpc>
+              <a:buNone/>
+            </a:pPr>
+            <a:r>
+              <a:rPr lang="en-US" sz="1250" dirty="0">
+                <a:solidFill>
+                  <a:srgbClr val="1E293B"/>
+                </a:solidFill>
+                <a:latin typeface="Courier New" pitchFamily="34" charset="0"/>
+                <a:ea typeface="Courier New" pitchFamily="34" charset="-122"/>
+                <a:cs typeface="Courier New" pitchFamily="34" charset="-120"/>
+              </a:rPr>
+              <a:t>prof.argmax()   # 가장 밝은 지점의 위치</a:t>
+            </a:r>
+            <a:endParaRPr lang="en-US" sz="1250" dirty="0"/>
+          </a:p>
+        </p:txBody>
+      </p:sp>
+      <p:sp>
+        <p:nvSpPr>
+          <p:cNvPr id="7" name="Shape 5"/>
+          <p:cNvSpPr/>
+          <p:nvPr/>
+        </p:nvSpPr>
+        <p:spPr>
+          <a:xfrm>
+            <a:off x="5303520" y="1965960"/>
+            <a:ext cx="3383280" cy="2286000"/>
+          </a:xfrm>
+          <a:prstGeom prst="roundRect">
+            <a:avLst>
+              <a:gd name="adj" fmla="val 3200"/>
+            </a:avLst>
+          </a:prstGeom>
+          <a:solidFill>
+            <a:srgbClr val="F0FDFA"/>
+          </a:solidFill>
+          <a:ln w="12700">
+            <a:solidFill>
+              <a:srgbClr val="E2E8F0"/>
+            </a:solidFill>
+            <a:prstDash val="solid"/>
+          </a:ln>
+          <a:effectLst>
+            <a:outerShdw sx="100000" sy="100000" kx="0" ky="0" algn="bl" rotWithShape="0" blurRad="88900" dist="25400" dir="5400000">
+              <a:srgbClr val="000000">
+                <a:alpha val="10000"/>
+              </a:srgbClr>
+            </a:outerShdw>
+          </a:effectLst>
+        </p:spPr>
+      </p:sp>
+      <p:sp>
+        <p:nvSpPr>
+          <p:cNvPr id="8" name="Text 6"/>
+          <p:cNvSpPr/>
+          <p:nvPr/>
+        </p:nvSpPr>
+        <p:spPr>
+          <a:xfrm>
+            <a:off x="5532120" y="2148840"/>
+            <a:ext cx="2926080" cy="365760"/>
+          </a:xfrm>
+          <a:prstGeom prst="rect">
+            <a:avLst/>
+          </a:prstGeom>
+          <a:noFill/>
+          <a:ln/>
+        </p:spPr>
+        <p:txBody>
+          <a:bodyPr wrap="square" rtlCol="0" anchor="ctr"/>
+          <a:lstStyle/>
+          <a:p>
+            <a:pPr indent="0" marL="0">
+              <a:buNone/>
+            </a:pPr>
+            <a:r>
+              <a:rPr lang="en-US" sz="1400" b="1" dirty="0">
+                <a:solidFill>
+                  <a:srgbClr val="0B6B61"/>
+                </a:solidFill>
+                <a:latin typeface="나눔고딕" pitchFamily="34" charset="0"/>
+                <a:ea typeface="나눔고딕" pitchFamily="34" charset="-122"/>
+                <a:cs typeface="나눔고딕" pitchFamily="34" charset="-120"/>
+              </a:rPr>
+              <a:t>계측에서의 쓰임</a:t>
+            </a:r>
+            <a:endParaRPr lang="en-US" sz="1400" dirty="0"/>
+          </a:p>
+        </p:txBody>
+      </p:sp>
+      <p:sp>
+        <p:nvSpPr>
+          <p:cNvPr id="9" name="Text 7"/>
+          <p:cNvSpPr/>
+          <p:nvPr/>
+        </p:nvSpPr>
+        <p:spPr>
+          <a:xfrm>
+            <a:off x="5532120" y="2560320"/>
+            <a:ext cx="2926080" cy="1554480"/>
           </a:xfrm>
           <a:prstGeom prst="rect">
             <a:avLst/>
@@ -8789,113 +9462,96 @@
           <a:p>
             <a:pPr marL="342900" indent="-342900">
               <a:lnSpc>
-                <a:spcPts val="2800"/>
+                <a:spcPts val="1900"/>
               </a:lnSpc>
               <a:spcAft>
-                <a:spcPts val="800"/>
+                <a:spcPts val="500"/>
               </a:spcAft>
               <a:buSzPct val="100000"/>
               <a:buChar char="•"/>
             </a:pPr>
             <a:r>
-              <a:rPr lang="en-US" sz="1600" dirty="0">
-                <a:solidFill>
-                  <a:srgbClr val="E2E8F0"/>
+              <a:rPr lang="en-US" sz="1250" dirty="0">
+                <a:solidFill>
+                  <a:srgbClr val="134E4A"/>
                 </a:solidFill>
                 <a:latin typeface="나눔고딕" pitchFamily="34" charset="0"/>
                 <a:ea typeface="나눔고딕" pitchFamily="34" charset="-122"/>
                 <a:cs typeface="나눔고딕" pitchFamily="34" charset="-120"/>
               </a:rPr>
-              <a:t>예제 이미지를 만들어 shape · dtype 확인하기</a:t>
-            </a:r>
-            <a:endParaRPr lang="en-US" sz="1600" dirty="0"/>
+              <a:t>가장 밝은 픽셀의 위치 찾기</a:t>
+            </a:r>
+            <a:endParaRPr lang="en-US" sz="1250" dirty="0"/>
           </a:p>
           <a:p>
             <a:pPr marL="342900" indent="-342900">
               <a:lnSpc>
-                <a:spcPts val="2800"/>
+                <a:spcPts val="1900"/>
               </a:lnSpc>
               <a:spcAft>
-                <a:spcPts val="800"/>
+                <a:spcPts val="500"/>
               </a:spcAft>
               <a:buSzPct val="100000"/>
               <a:buChar char="•"/>
             </a:pPr>
             <a:r>
-              <a:rPr lang="en-US" sz="1600" dirty="0">
-                <a:solidFill>
-                  <a:srgbClr val="E2E8F0"/>
+              <a:rPr lang="en-US" sz="1250" dirty="0">
+                <a:solidFill>
+                  <a:srgbClr val="134E4A"/>
                 </a:solidFill>
                 <a:latin typeface="나눔고딕" pitchFamily="34" charset="0"/>
                 <a:ea typeface="나눔고딕" pitchFamily="34" charset="-122"/>
                 <a:cs typeface="나눔고딕" pitchFamily="34" charset="-120"/>
               </a:rPr>
-              <a:t>슬라이싱으로 ROI 잘라내고 값 바꿔보기</a:t>
-            </a:r>
-            <a:endParaRPr lang="en-US" sz="1600" dirty="0"/>
-          </a:p>
-          <a:p>
-            <a:pPr marL="342900" indent="-342900">
+              <a:t>엣지 = gradient 가 최대인 위치</a:t>
+            </a:r>
+            <a:endParaRPr lang="en-US" sz="1250" dirty="0"/>
+          </a:p>
+          <a:p>
+            <a:pPr indent="0" marL="0">
               <a:lnSpc>
-                <a:spcPts val="2800"/>
+                <a:spcPts val="1900"/>
               </a:lnSpc>
               <a:spcAft>
-                <a:spcPts val="800"/>
+                <a:spcPts val="500"/>
               </a:spcAft>
-              <a:buSzPct val="100000"/>
-              <a:buChar char="•"/>
-            </a:pPr>
-            <a:r>
-              <a:rPr lang="en-US" sz="1600" dirty="0">
-                <a:solidFill>
-                  <a:srgbClr val="E2E8F0"/>
+              <a:buNone/>
+            </a:pPr>
+            <a:r>
+              <a:rPr lang="en-US" sz="1250" dirty="0">
+                <a:solidFill>
+                  <a:srgbClr val="134E4A"/>
                 </a:solidFill>
                 <a:latin typeface="나눔고딕" pitchFamily="34" charset="0"/>
                 <a:ea typeface="나눔고딕" pitchFamily="34" charset="-122"/>
                 <a:cs typeface="나눔고딕" pitchFamily="34" charset="-120"/>
               </a:rPr>
-              <a:t>조건 마스크로 특정 밝기 픽셀만 세기</a:t>
-            </a:r>
-            <a:endParaRPr lang="en-US" sz="1600" dirty="0"/>
-          </a:p>
-        </p:txBody>
-      </p:sp>
-      <p:sp>
-        <p:nvSpPr>
-          <p:cNvPr id="5" name="Text 3"/>
-          <p:cNvSpPr/>
-          <p:nvPr/>
-        </p:nvSpPr>
-        <p:spPr>
-          <a:xfrm>
-            <a:off x="640080" y="4160520"/>
-            <a:ext cx="7863840" cy="457200"/>
-          </a:xfrm>
-          <a:prstGeom prst="rect">
-            <a:avLst/>
-          </a:prstGeom>
-          <a:noFill/>
-          <a:ln/>
-        </p:spPr>
-        <p:txBody>
-          <a:bodyPr wrap="square" rtlCol="0" anchor="t"/>
-          <a:lstStyle/>
+              <a:t>→ i = np.argmax(gradient)</a:t>
+            </a:r>
+            <a:endParaRPr lang="en-US" sz="1250" dirty="0"/>
+          </a:p>
           <a:p>
             <a:pPr indent="0" marL="0">
-              <a:buNone/>
-            </a:pPr>
-            <a:r>
-              <a:rPr lang="en-US" sz="1350" i="1" dirty="0">
-                <a:solidFill>
-                  <a:srgbClr val="94A3B8"/>
+              <a:lnSpc>
+                <a:spcPts val="1900"/>
+              </a:lnSpc>
+              <a:spcAft>
+                <a:spcPts val="500"/>
+              </a:spcAft>
+              <a:buNone/>
+            </a:pPr>
+            <a:r>
+              <a:rPr lang="en-US" sz="1250" dirty="0">
+                <a:solidFill>
+                  <a:srgbClr val="134E4A"/>
                 </a:solidFill>
                 <a:latin typeface="나눔고딕" pitchFamily="34" charset="0"/>
                 <a:ea typeface="나눔고딕" pitchFamily="34" charset="-122"/>
                 <a:cs typeface="나눔고딕" pitchFamily="34" charset="-120"/>
               </a:rPr>
-              <a:t>실습: 03_numpy_image.ipynb · 03_practice.ipynb</a:t>
-            </a:r>
-            <a:endParaRPr lang="en-US" sz="1350" dirty="0"/>
+              <a:t>(Phase 6 서브픽셀로 이어짐)</a:t>
+            </a:r>
+            <a:endParaRPr lang="en-US" sz="1250" dirty="0"/>
           </a:p>
         </p:txBody>
       </p:sp>
